--- a/军民融合/ppt/研究方案3.pptx
+++ b/军民融合/ppt/研究方案3.pptx
@@ -104,6 +104,11 @@
       </a:defRPr>
     </a:lvl9pPr>
   </p:defaultTextStyle>
+  <p:extLst>
+    <p:ext uri="{EFAFB233-063F-42B5-8137-9DF3F51BA10A}">
+      <p15:sldGuideLst xmlns:p15="http://schemas.microsoft.com/office/powerpoint/2012/main"/>
+    </p:ext>
+  </p:extLst>
 </p:presentation>
 </file>
 
@@ -3347,7 +3352,7 @@
                   <a:latin typeface="黑体" panose="02010609060101010101" pitchFamily="49" charset="-122"/>
                   <a:ea typeface="黑体" panose="02010609060101010101" pitchFamily="49" charset="-122"/>
                 </a:rPr>
-                <a:t>基于态势认知的</a:t>
+                <a:t>态势驱动的</a:t>
               </a:r>
               <a:endParaRPr lang="en-US" altLang="zh-CN" sz="2000" b="1" dirty="0">
                 <a:solidFill>
@@ -3635,7 +3640,7 @@
                   <a:latin typeface="黑体" panose="02010609060101010101" pitchFamily="49" charset="-122"/>
                   <a:ea typeface="黑体" panose="02010609060101010101" pitchFamily="49" charset="-122"/>
                 </a:rPr>
-                <a:t>轻量化频谱信号识别</a:t>
+                <a:t>轻量化频谱目标识别</a:t>
               </a:r>
               <a:endParaRPr lang="en-US" altLang="zh-CN" sz="2000" b="1" dirty="0">
                 <a:solidFill>
@@ -3655,7 +3660,7 @@
                   <a:latin typeface="黑体" panose="02010609060101010101" pitchFamily="49" charset="-122"/>
                   <a:ea typeface="黑体" panose="02010609060101010101" pitchFamily="49" charset="-122"/>
                 </a:rPr>
-                <a:t>与目标轨迹分析方法</a:t>
+                <a:t>与轨迹分析方法</a:t>
               </a:r>
             </a:p>
           </p:txBody>

--- a/军民融合/ppt/研究方案3.pptx
+++ b/军民融合/ppt/研究方案3.pptx
@@ -243,7 +243,7 @@
           <a:p>
             <a:fld id="{CBA945C4-647B-4518-BEEF-211FAC14610B}" type="datetimeFigureOut">
               <a:rPr lang="zh-CN" altLang="en-US" smtClean="0"/>
-              <a:t>2026/6/16</a:t>
+              <a:t>2026/6/17</a:t>
             </a:fld>
             <a:endParaRPr lang="zh-CN" altLang="en-US"/>
           </a:p>
@@ -413,7 +413,7 @@
           <a:p>
             <a:fld id="{CBA945C4-647B-4518-BEEF-211FAC14610B}" type="datetimeFigureOut">
               <a:rPr lang="zh-CN" altLang="en-US" smtClean="0"/>
-              <a:t>2026/6/16</a:t>
+              <a:t>2026/6/17</a:t>
             </a:fld>
             <a:endParaRPr lang="zh-CN" altLang="en-US"/>
           </a:p>
@@ -593,7 +593,7 @@
           <a:p>
             <a:fld id="{CBA945C4-647B-4518-BEEF-211FAC14610B}" type="datetimeFigureOut">
               <a:rPr lang="zh-CN" altLang="en-US" smtClean="0"/>
-              <a:t>2026/6/16</a:t>
+              <a:t>2026/6/17</a:t>
             </a:fld>
             <a:endParaRPr lang="zh-CN" altLang="en-US"/>
           </a:p>
@@ -763,7 +763,7 @@
           <a:p>
             <a:fld id="{CBA945C4-647B-4518-BEEF-211FAC14610B}" type="datetimeFigureOut">
               <a:rPr lang="zh-CN" altLang="en-US" smtClean="0"/>
-              <a:t>2026/6/16</a:t>
+              <a:t>2026/6/17</a:t>
             </a:fld>
             <a:endParaRPr lang="zh-CN" altLang="en-US"/>
           </a:p>
@@ -1009,7 +1009,7 @@
           <a:p>
             <a:fld id="{CBA945C4-647B-4518-BEEF-211FAC14610B}" type="datetimeFigureOut">
               <a:rPr lang="zh-CN" altLang="en-US" smtClean="0"/>
-              <a:t>2026/6/16</a:t>
+              <a:t>2026/6/17</a:t>
             </a:fld>
             <a:endParaRPr lang="zh-CN" altLang="en-US"/>
           </a:p>
@@ -1241,7 +1241,7 @@
           <a:p>
             <a:fld id="{CBA945C4-647B-4518-BEEF-211FAC14610B}" type="datetimeFigureOut">
               <a:rPr lang="zh-CN" altLang="en-US" smtClean="0"/>
-              <a:t>2026/6/16</a:t>
+              <a:t>2026/6/17</a:t>
             </a:fld>
             <a:endParaRPr lang="zh-CN" altLang="en-US"/>
           </a:p>
@@ -1608,7 +1608,7 @@
           <a:p>
             <a:fld id="{CBA945C4-647B-4518-BEEF-211FAC14610B}" type="datetimeFigureOut">
               <a:rPr lang="zh-CN" altLang="en-US" smtClean="0"/>
-              <a:t>2026/6/16</a:t>
+              <a:t>2026/6/17</a:t>
             </a:fld>
             <a:endParaRPr lang="zh-CN" altLang="en-US"/>
           </a:p>
@@ -1726,7 +1726,7 @@
           <a:p>
             <a:fld id="{CBA945C4-647B-4518-BEEF-211FAC14610B}" type="datetimeFigureOut">
               <a:rPr lang="zh-CN" altLang="en-US" smtClean="0"/>
-              <a:t>2026/6/16</a:t>
+              <a:t>2026/6/17</a:t>
             </a:fld>
             <a:endParaRPr lang="zh-CN" altLang="en-US"/>
           </a:p>
@@ -1821,7 +1821,7 @@
           <a:p>
             <a:fld id="{CBA945C4-647B-4518-BEEF-211FAC14610B}" type="datetimeFigureOut">
               <a:rPr lang="zh-CN" altLang="en-US" smtClean="0"/>
-              <a:t>2026/6/16</a:t>
+              <a:t>2026/6/17</a:t>
             </a:fld>
             <a:endParaRPr lang="zh-CN" altLang="en-US"/>
           </a:p>
@@ -2098,7 +2098,7 @@
           <a:p>
             <a:fld id="{CBA945C4-647B-4518-BEEF-211FAC14610B}" type="datetimeFigureOut">
               <a:rPr lang="zh-CN" altLang="en-US" smtClean="0"/>
-              <a:t>2026/6/16</a:t>
+              <a:t>2026/6/17</a:t>
             </a:fld>
             <a:endParaRPr lang="zh-CN" altLang="en-US"/>
           </a:p>
@@ -2355,7 +2355,7 @@
           <a:p>
             <a:fld id="{CBA945C4-647B-4518-BEEF-211FAC14610B}" type="datetimeFigureOut">
               <a:rPr lang="zh-CN" altLang="en-US" smtClean="0"/>
-              <a:t>2026/6/16</a:t>
+              <a:t>2026/6/17</a:t>
             </a:fld>
             <a:endParaRPr lang="zh-CN" altLang="en-US"/>
           </a:p>
@@ -2568,7 +2568,7 @@
           <a:p>
             <a:fld id="{CBA945C4-647B-4518-BEEF-211FAC14610B}" type="datetimeFigureOut">
               <a:rPr lang="zh-CN" altLang="en-US" smtClean="0"/>
-              <a:t>2026/6/16</a:t>
+              <a:t>2026/6/17</a:t>
             </a:fld>
             <a:endParaRPr lang="zh-CN" altLang="en-US"/>
           </a:p>
@@ -2987,7 +2987,7 @@
         </p:nvGrpSpPr>
         <p:grpSpPr>
           <a:xfrm>
-            <a:off x="462398" y="3925919"/>
+            <a:off x="677548" y="3925919"/>
             <a:ext cx="3461498" cy="961464"/>
             <a:chOff x="1062318" y="934571"/>
             <a:chExt cx="3461498" cy="961464"/>
@@ -3166,7 +3166,7 @@
         </p:nvSpPr>
         <p:spPr>
           <a:xfrm>
-            <a:off x="5829888" y="3350698"/>
+            <a:off x="5601207" y="3367034"/>
             <a:ext cx="3890229" cy="400110"/>
           </a:xfrm>
           <a:prstGeom prst="rect">
@@ -3207,7 +3207,7 @@
         </p:nvSpPr>
         <p:spPr>
           <a:xfrm>
-            <a:off x="828839" y="3369147"/>
+            <a:off x="1043989" y="3369147"/>
             <a:ext cx="4062800" cy="400110"/>
           </a:xfrm>
           <a:prstGeom prst="rect">
@@ -3248,7 +3248,7 @@
         </p:nvGrpSpPr>
         <p:grpSpPr>
           <a:xfrm>
-            <a:off x="334570" y="875049"/>
+            <a:off x="549720" y="875049"/>
             <a:ext cx="2914654" cy="2270568"/>
             <a:chOff x="1216957" y="1603712"/>
             <a:chExt cx="2914654" cy="2270568"/>
@@ -3516,7 +3516,7 @@
         </p:nvGrpSpPr>
         <p:grpSpPr>
           <a:xfrm>
-            <a:off x="3640303" y="880643"/>
+            <a:off x="3855453" y="880643"/>
             <a:ext cx="2809316" cy="2331842"/>
             <a:chOff x="4522690" y="1609306"/>
             <a:chExt cx="2809316" cy="2331842"/>
@@ -3760,10 +3760,10 @@
         </p:nvGrpSpPr>
         <p:grpSpPr>
           <a:xfrm>
-            <a:off x="6910181" y="875050"/>
-            <a:ext cx="3461499" cy="2264973"/>
-            <a:chOff x="7792567" y="1603712"/>
-            <a:chExt cx="3461499" cy="2264973"/>
+            <a:off x="7125331" y="895741"/>
+            <a:ext cx="2969260" cy="2264973"/>
+            <a:chOff x="7792567" y="1624403"/>
+            <a:chExt cx="2969260" cy="2264973"/>
           </a:xfrm>
         </p:grpSpPr>
         <p:sp>
@@ -3780,8 +3780,8 @@
           </p:nvSpPr>
           <p:spPr>
             <a:xfrm>
-              <a:off x="7792568" y="1603712"/>
-              <a:ext cx="3461498" cy="2264973"/>
+              <a:off x="7798639" y="1624403"/>
+              <a:ext cx="2915041" cy="2264973"/>
             </a:xfrm>
             <a:prstGeom prst="roundRect">
               <a:avLst>
@@ -3835,7 +3835,7 @@
           <p:spPr>
             <a:xfrm>
               <a:off x="7792567" y="1723333"/>
-              <a:ext cx="3461498" cy="1015663"/>
+              <a:ext cx="2921113" cy="1015663"/>
             </a:xfrm>
             <a:prstGeom prst="rect">
               <a:avLst/>
@@ -3859,7 +3859,7 @@
                   <a:latin typeface="黑体" panose="02010609060101010101" pitchFamily="49" charset="-122"/>
                   <a:ea typeface="黑体" panose="02010609060101010101" pitchFamily="49" charset="-122"/>
                 </a:rPr>
-                <a:t>基于有限链路轻量安全传输</a:t>
+                <a:t>基于轻量安全传输</a:t>
               </a:r>
               <a:endParaRPr lang="en-US" altLang="zh-CN" sz="2000" b="1" dirty="0">
                 <a:solidFill>
@@ -3899,7 +3899,7 @@
                   <a:latin typeface="黑体" panose="02010609060101010101" pitchFamily="49" charset="-122"/>
                   <a:ea typeface="黑体" panose="02010609060101010101" pitchFamily="49" charset="-122"/>
                 </a:rPr>
-                <a:t>分布式可信协同决策方法</a:t>
+                <a:t>可信协同决策方法</a:t>
               </a:r>
             </a:p>
           </p:txBody>
@@ -3968,10 +3968,10 @@
         </p:sp>
         <p:pic>
           <p:nvPicPr>
-            <p:cNvPr id="37" name="图形 36">
+            <p:cNvPr id="39" name="图形 38">
               <a:extLst>
                 <a:ext uri="{FF2B5EF4-FFF2-40B4-BE49-F238E27FC236}">
-                  <a16:creationId xmlns:a16="http://schemas.microsoft.com/office/drawing/2014/main" id="{5BC4CE2F-0D78-C529-AFA1-94C9FFB463A0}"/>
+                  <a16:creationId xmlns:a16="http://schemas.microsoft.com/office/drawing/2014/main" id="{7CB193AB-BD03-8151-9E3F-ED85322D25F3}"/>
                 </a:ext>
               </a:extLst>
             </p:cNvPr>
@@ -3985,42 +3985,6 @@
               <a:extLst>
                 <a:ext uri="{96DAC541-7B7A-43D3-8B79-37D633B846F1}">
                   <asvg:svgBlip xmlns:asvg="http://schemas.microsoft.com/office/drawing/2016/SVG/main" r:embed="rId7"/>
-                </a:ext>
-              </a:extLst>
-            </a:blip>
-            <a:stretch>
-              <a:fillRect/>
-            </a:stretch>
-          </p:blipFill>
-          <p:spPr>
-            <a:xfrm>
-              <a:off x="10602503" y="3011866"/>
-              <a:ext cx="597271" cy="653835"/>
-            </a:xfrm>
-            <a:prstGeom prst="rect">
-              <a:avLst/>
-            </a:prstGeom>
-          </p:spPr>
-        </p:pic>
-        <p:pic>
-          <p:nvPicPr>
-            <p:cNvPr id="39" name="图形 38">
-              <a:extLst>
-                <a:ext uri="{FF2B5EF4-FFF2-40B4-BE49-F238E27FC236}">
-                  <a16:creationId xmlns:a16="http://schemas.microsoft.com/office/drawing/2014/main" id="{7CB193AB-BD03-8151-9E3F-ED85322D25F3}"/>
-                </a:ext>
-              </a:extLst>
-            </p:cNvPr>
-            <p:cNvPicPr>
-              <a:picLocks noChangeAspect="1"/>
-            </p:cNvPicPr>
-            <p:nvPr/>
-          </p:nvPicPr>
-          <p:blipFill>
-            <a:blip r:embed="rId8">
-              <a:extLst>
-                <a:ext uri="{96DAC541-7B7A-43D3-8B79-37D633B846F1}">
-                  <asvg:svgBlip xmlns:asvg="http://schemas.microsoft.com/office/drawing/2016/SVG/main" r:embed="rId9"/>
                 </a:ext>
               </a:extLst>
             </a:blip>
@@ -4055,7 +4019,7 @@
         </p:nvCxnSpPr>
         <p:spPr>
           <a:xfrm rot="16200000" flipH="1">
-            <a:off x="3399599" y="-730506"/>
+            <a:off x="3614749" y="-730506"/>
             <a:ext cx="5594" cy="3274357"/>
           </a:xfrm>
           <a:prstGeom prst="bentConnector3">
@@ -4096,7 +4060,7 @@
         </p:nvSpPr>
         <p:spPr>
           <a:xfrm>
-            <a:off x="2610917" y="400363"/>
+            <a:off x="2826067" y="400363"/>
             <a:ext cx="1613649" cy="327910"/>
           </a:xfrm>
           <a:prstGeom prst="rect">
@@ -4144,13 +4108,13 @@
         </p:nvCxnSpPr>
         <p:spPr>
           <a:xfrm flipV="1">
-            <a:off x="5040482" y="875049"/>
-            <a:ext cx="3600449" cy="200966"/>
+            <a:off x="5261703" y="895741"/>
+            <a:ext cx="3327221" cy="200965"/>
           </a:xfrm>
           <a:prstGeom prst="bentConnector4">
             <a:avLst>
-              <a:gd name="adj1" fmla="val 25965"/>
-              <a:gd name="adj2" fmla="val 252067"/>
+              <a:gd name="adj1" fmla="val 28097"/>
+              <a:gd name="adj2" fmla="val 213751"/>
             </a:avLst>
           </a:prstGeom>
           <a:ln w="44450">
@@ -4191,7 +4155,7 @@
         </p:nvSpPr>
         <p:spPr>
           <a:xfrm>
-            <a:off x="6421993" y="377192"/>
+            <a:off x="6637143" y="377192"/>
             <a:ext cx="1613649" cy="327910"/>
           </a:xfrm>
           <a:prstGeom prst="rect">
@@ -4236,10 +4200,10 @@
         </p:nvGrpSpPr>
         <p:grpSpPr>
           <a:xfrm>
-            <a:off x="6246161" y="3992766"/>
-            <a:ext cx="4071227" cy="827770"/>
-            <a:chOff x="2858616" y="5728975"/>
-            <a:chExt cx="4071227" cy="827770"/>
+            <a:off x="6543934" y="4000573"/>
+            <a:ext cx="3538593" cy="827770"/>
+            <a:chOff x="2945081" y="5736782"/>
+            <a:chExt cx="3798644" cy="827770"/>
           </a:xfrm>
         </p:grpSpPr>
         <p:sp>
@@ -4256,8 +4220,8 @@
           </p:nvSpPr>
           <p:spPr>
             <a:xfrm>
-              <a:off x="2858616" y="5728975"/>
-              <a:ext cx="4071227" cy="827770"/>
+              <a:off x="2945081" y="5736782"/>
+              <a:ext cx="3665468" cy="827770"/>
             </a:xfrm>
             <a:prstGeom prst="rect">
               <a:avLst/>
@@ -4309,10 +4273,10 @@
             <p:nvPr/>
           </p:nvPicPr>
           <p:blipFill>
-            <a:blip r:embed="rId10">
+            <a:blip r:embed="rId8">
               <a:extLst>
                 <a:ext uri="{96DAC541-7B7A-43D3-8B79-37D633B846F1}">
-                  <asvg:svgBlip xmlns:asvg="http://schemas.microsoft.com/office/drawing/2016/SVG/main" r:embed="rId11"/>
+                  <asvg:svgBlip xmlns:asvg="http://schemas.microsoft.com/office/drawing/2016/SVG/main" r:embed="rId9"/>
                 </a:ext>
               </a:extLst>
             </a:blip>
@@ -4344,7 +4308,7 @@
           </p:nvSpPr>
           <p:spPr>
             <a:xfrm>
-              <a:off x="3748795" y="5753046"/>
+              <a:off x="3562677" y="5774020"/>
               <a:ext cx="3181048" cy="707886"/>
             </a:xfrm>
             <a:prstGeom prst="rect">
@@ -4395,10 +4359,10 @@
           <p:nvPr/>
         </p:nvPicPr>
         <p:blipFill>
-          <a:blip r:embed="rId12">
+          <a:blip r:embed="rId10">
             <a:extLst>
               <a:ext uri="{96DAC541-7B7A-43D3-8B79-37D633B846F1}">
-                <asvg:svgBlip xmlns:asvg="http://schemas.microsoft.com/office/drawing/2016/SVG/main" r:embed="rId13"/>
+                <asvg:svgBlip xmlns:asvg="http://schemas.microsoft.com/office/drawing/2016/SVG/main" r:embed="rId11"/>
               </a:ext>
             </a:extLst>
           </a:blip>
@@ -4408,7 +4372,7 @@
         </p:blipFill>
         <p:spPr>
           <a:xfrm>
-            <a:off x="4278998" y="3732359"/>
+            <a:off x="4494148" y="3732359"/>
             <a:ext cx="1698437" cy="1376296"/>
           </a:xfrm>
           <a:prstGeom prst="rect">
@@ -4433,7 +4397,7 @@
         </p:nvCxnSpPr>
         <p:spPr>
           <a:xfrm rot="10800000" flipH="1">
-            <a:off x="462398" y="3212485"/>
+            <a:off x="677548" y="3212485"/>
             <a:ext cx="258266" cy="1194166"/>
           </a:xfrm>
           <a:prstGeom prst="bentConnector4">
@@ -4481,7 +4445,7 @@
         </p:nvSpPr>
         <p:spPr>
           <a:xfrm>
-            <a:off x="3175262" y="2007536"/>
+            <a:off x="3390412" y="2007536"/>
             <a:ext cx="474472" cy="394515"/>
           </a:xfrm>
           <a:prstGeom prst="rightArrow">
@@ -4532,7 +4496,7 @@
         </p:nvSpPr>
         <p:spPr>
           <a:xfrm>
-            <a:off x="6456597" y="2028228"/>
+            <a:off x="6671747" y="2028228"/>
             <a:ext cx="474472" cy="394515"/>
           </a:xfrm>
           <a:prstGeom prst="rightArrow">
@@ -4580,19 +4544,19 @@
           </p:cNvPr>
           <p:cNvCxnSpPr>
             <a:cxnSpLocks/>
-            <a:endCxn id="61" idx="3"/>
+            <a:endCxn id="21" idx="3"/>
           </p:cNvCxnSpPr>
           <p:nvPr/>
         </p:nvCxnSpPr>
         <p:spPr>
           <a:xfrm rot="16200000" flipH="1">
-            <a:off x="9443095" y="3496487"/>
-            <a:ext cx="1158293" cy="590293"/>
+            <a:off x="9152561" y="3608551"/>
+            <a:ext cx="1268842" cy="342972"/>
           </a:xfrm>
           <a:prstGeom prst="bentConnector4">
             <a:avLst>
-              <a:gd name="adj1" fmla="val 34721"/>
-              <a:gd name="adj2" fmla="val 138727"/>
+              <a:gd name="adj1" fmla="val 33690"/>
+              <a:gd name="adj2" fmla="val 166653"/>
             </a:avLst>
           </a:prstGeom>
           <a:ln w="44450">
